--- a/01-data-informace-znalosti-zdroje/cviceni-01.pptx
+++ b/01-data-informace-znalosti-zdroje/cviceni-01.pptx
@@ -307,6 +307,13 @@
               <a:schemeClr val="lt1"/>
             </a:fontRef>
           </p:style>
+          <p:txBody>
+            <a:bodyPr/>
+            <a:lstStyle/>
+            <a:p>
+              <a:endParaRPr lang="cs-CZ"/>
+            </a:p>
+          </p:txBody>
         </p:sp>
         <p:sp>
           <p:nvSpPr>
@@ -370,6 +377,13 @@
               <a:schemeClr val="lt1"/>
             </a:fontRef>
           </p:style>
+          <p:txBody>
+            <a:bodyPr/>
+            <a:lstStyle/>
+            <a:p>
+              <a:endParaRPr lang="cs-CZ"/>
+            </a:p>
+          </p:txBody>
         </p:sp>
         <p:sp>
           <p:nvSpPr>
@@ -411,6 +425,13 @@
               <a:schemeClr val="lt1"/>
             </a:fontRef>
           </p:style>
+          <p:txBody>
+            <a:bodyPr/>
+            <a:lstStyle/>
+            <a:p>
+              <a:endParaRPr lang="cs-CZ"/>
+            </a:p>
+          </p:txBody>
         </p:sp>
         <p:sp>
           <p:nvSpPr>
@@ -475,6 +496,13 @@
               <a:schemeClr val="lt1"/>
             </a:fontRef>
           </p:style>
+          <p:txBody>
+            <a:bodyPr/>
+            <a:lstStyle/>
+            <a:p>
+              <a:endParaRPr lang="cs-CZ"/>
+            </a:p>
+          </p:txBody>
         </p:sp>
         <p:sp>
           <p:nvSpPr>
@@ -540,6 +568,13 @@
               <a:schemeClr val="lt1"/>
             </a:fontRef>
           </p:style>
+          <p:txBody>
+            <a:bodyPr/>
+            <a:lstStyle/>
+            <a:p>
+              <a:endParaRPr lang="cs-CZ"/>
+            </a:p>
+          </p:txBody>
         </p:sp>
         <p:sp>
           <p:nvSpPr>
@@ -603,6 +638,13 @@
               <a:schemeClr val="lt1"/>
             </a:fontRef>
           </p:style>
+          <p:txBody>
+            <a:bodyPr/>
+            <a:lstStyle/>
+            <a:p>
+              <a:endParaRPr lang="cs-CZ"/>
+            </a:p>
+          </p:txBody>
         </p:sp>
         <p:sp>
           <p:nvSpPr>
@@ -644,6 +686,13 @@
               <a:schemeClr val="lt1"/>
             </a:fontRef>
           </p:style>
+          <p:txBody>
+            <a:bodyPr/>
+            <a:lstStyle/>
+            <a:p>
+              <a:endParaRPr lang="cs-CZ"/>
+            </a:p>
+          </p:txBody>
         </p:sp>
         <p:sp>
           <p:nvSpPr>
@@ -685,6 +734,13 @@
               <a:schemeClr val="lt1"/>
             </a:fontRef>
           </p:style>
+          <p:txBody>
+            <a:bodyPr/>
+            <a:lstStyle/>
+            <a:p>
+              <a:endParaRPr lang="cs-CZ"/>
+            </a:p>
+          </p:txBody>
         </p:sp>
       </p:grpSp>
       <p:sp>
@@ -863,7 +919,7 @@
             <a:fld id="{5586B75A-687E-405C-8A0B-8D00578BA2C3}" type="datetimeFigureOut">
               <a:rPr lang="en-US" smtClean="0"/>
               <a:pPr/>
-              <a:t>9/20/2022</a:t>
+              <a:t>9/20/2026</a:t>
             </a:fld>
             <a:endParaRPr lang="en-US" dirty="0"/>
           </a:p>
@@ -1116,7 +1172,7 @@
             <a:fld id="{5586B75A-687E-405C-8A0B-8D00578BA2C3}" type="datetimeFigureOut">
               <a:rPr lang="en-US" smtClean="0"/>
               <a:pPr/>
-              <a:t>9/20/2022</a:t>
+              <a:t>9/20/2026</a:t>
             </a:fld>
             <a:endParaRPr lang="en-US" dirty="0"/>
           </a:p>
@@ -1433,7 +1489,7 @@
             <a:fld id="{5586B75A-687E-405C-8A0B-8D00578BA2C3}" type="datetimeFigureOut">
               <a:rPr lang="en-US" smtClean="0"/>
               <a:pPr/>
-              <a:t>9/20/2022</a:t>
+              <a:t>9/20/2026</a:t>
             </a:fld>
             <a:endParaRPr lang="en-US" dirty="0"/>
           </a:p>
@@ -1763,7 +1819,7 @@
             <a:fld id="{5586B75A-687E-405C-8A0B-8D00578BA2C3}" type="datetimeFigureOut">
               <a:rPr lang="en-US" smtClean="0"/>
               <a:pPr/>
-              <a:t>9/20/2022</a:t>
+              <a:t>9/20/2026</a:t>
             </a:fld>
             <a:endParaRPr lang="en-US" dirty="0"/>
           </a:p>
@@ -2080,7 +2136,7 @@
             <a:fld id="{5586B75A-687E-405C-8A0B-8D00578BA2C3}" type="datetimeFigureOut">
               <a:rPr lang="en-US" smtClean="0"/>
               <a:pPr/>
-              <a:t>9/20/2022</a:t>
+              <a:t>9/20/2026</a:t>
             </a:fld>
             <a:endParaRPr lang="en-US" dirty="0"/>
           </a:p>
@@ -2470,7 +2526,7 @@
             <a:fld id="{5586B75A-687E-405C-8A0B-8D00578BA2C3}" type="datetimeFigureOut">
               <a:rPr lang="en-US" smtClean="0"/>
               <a:pPr/>
-              <a:t>9/20/2022</a:t>
+              <a:t>9/20/2026</a:t>
             </a:fld>
             <a:endParaRPr lang="en-US" dirty="0"/>
           </a:p>
@@ -2642,7 +2698,7 @@
           <a:p>
             <a:fld id="{5F4E5243-F52A-4D37-9694-EB26C6C31910}" type="datetimeFigureOut">
               <a:rPr lang="en-US" smtClean="0"/>
-              <a:t>9/20/2022</a:t>
+              <a:t>9/20/2026</a:t>
             </a:fld>
             <a:endParaRPr lang="en-US" dirty="0"/>
           </a:p>
@@ -2822,7 +2878,7 @@
           <a:p>
             <a:fld id="{3A77B6E1-634A-48DC-9E8B-D894023267EF}" type="datetimeFigureOut">
               <a:rPr lang="en-US" smtClean="0"/>
-              <a:t>9/20/2022</a:t>
+              <a:t>9/20/2026</a:t>
             </a:fld>
             <a:endParaRPr lang="en-US" dirty="0"/>
           </a:p>
@@ -2998,7 +3054,7 @@
           <a:p>
             <a:fld id="{7B2D3E9E-A95C-48F2-B4BF-A71542E0BE9A}" type="datetimeFigureOut">
               <a:rPr lang="en-US" smtClean="0"/>
-              <a:t>9/20/2022</a:t>
+              <a:t>9/20/2026</a:t>
             </a:fld>
             <a:endParaRPr lang="en-US" dirty="0"/>
           </a:p>
@@ -3246,7 +3302,7 @@
             <a:fld id="{5586B75A-687E-405C-8A0B-8D00578BA2C3}" type="datetimeFigureOut">
               <a:rPr lang="en-US" smtClean="0"/>
               <a:pPr/>
-              <a:t>9/20/2022</a:t>
+              <a:t>9/20/2026</a:t>
             </a:fld>
             <a:endParaRPr lang="en-US" dirty="0"/>
           </a:p>
@@ -3479,7 +3535,7 @@
           <a:p>
             <a:fld id="{F12952B5-7A2F-4CC8-B7CE-9234E21C2837}" type="datetimeFigureOut">
               <a:rPr lang="en-US" smtClean="0"/>
-              <a:t>9/20/2022</a:t>
+              <a:t>9/20/2026</a:t>
             </a:fld>
             <a:endParaRPr lang="en-US" dirty="0"/>
           </a:p>
@@ -3853,7 +3909,7 @@
           <a:p>
             <a:fld id="{CE1DA07A-9201-4B4B-BAF2-015AFA30F520}" type="datetimeFigureOut">
               <a:rPr lang="en-US" smtClean="0"/>
-              <a:t>9/20/2022</a:t>
+              <a:t>9/20/2026</a:t>
             </a:fld>
             <a:endParaRPr lang="en-US" dirty="0"/>
           </a:p>
@@ -3976,7 +4032,7 @@
           <a:p>
             <a:fld id="{73D7E00A-486F-4252-8B1D-E32645521F49}" type="datetimeFigureOut">
               <a:rPr lang="en-US" smtClean="0"/>
-              <a:t>9/20/2022</a:t>
+              <a:t>9/20/2026</a:t>
             </a:fld>
             <a:endParaRPr lang="en-US" dirty="0"/>
           </a:p>
@@ -4071,7 +4127,7 @@
           <a:p>
             <a:fld id="{8DDF5F92-E675-4B36-9A60-69A962A68675}" type="datetimeFigureOut">
               <a:rPr lang="en-US" smtClean="0"/>
-              <a:t>9/20/2022</a:t>
+              <a:t>9/20/2026</a:t>
             </a:fld>
             <a:endParaRPr lang="en-US" dirty="0"/>
           </a:p>
@@ -4326,7 +4382,7 @@
           <a:p>
             <a:fld id="{AF6E2C9B-5FA2-460D-9BE7-B0812FC2A6FF}" type="datetimeFigureOut">
               <a:rPr lang="en-US" smtClean="0"/>
-              <a:t>9/20/2022</a:t>
+              <a:t>9/20/2026</a:t>
             </a:fld>
             <a:endParaRPr lang="en-US" dirty="0"/>
           </a:p>
@@ -4591,7 +4647,7 @@
             <a:fld id="{5586B75A-687E-405C-8A0B-8D00578BA2C3}" type="datetimeFigureOut">
               <a:rPr lang="en-US" smtClean="0"/>
               <a:pPr/>
-              <a:t>9/20/2022</a:t>
+              <a:t>9/20/2026</a:t>
             </a:fld>
             <a:endParaRPr lang="en-US" dirty="0"/>
           </a:p>
@@ -4827,6 +4883,13 @@
               <a:schemeClr val="lt1"/>
             </a:fontRef>
           </p:style>
+          <p:txBody>
+            <a:bodyPr/>
+            <a:lstStyle/>
+            <a:p>
+              <a:endParaRPr lang="cs-CZ"/>
+            </a:p>
+          </p:txBody>
         </p:sp>
         <p:sp>
           <p:nvSpPr>
@@ -4890,6 +4953,13 @@
               <a:schemeClr val="lt1"/>
             </a:fontRef>
           </p:style>
+          <p:txBody>
+            <a:bodyPr/>
+            <a:lstStyle/>
+            <a:p>
+              <a:endParaRPr lang="cs-CZ"/>
+            </a:p>
+          </p:txBody>
         </p:sp>
         <p:sp>
           <p:nvSpPr>
@@ -4931,6 +5001,13 @@
               <a:schemeClr val="lt1"/>
             </a:fontRef>
           </p:style>
+          <p:txBody>
+            <a:bodyPr/>
+            <a:lstStyle/>
+            <a:p>
+              <a:endParaRPr lang="cs-CZ"/>
+            </a:p>
+          </p:txBody>
         </p:sp>
         <p:sp>
           <p:nvSpPr>
@@ -4995,6 +5072,13 @@
               <a:schemeClr val="lt1"/>
             </a:fontRef>
           </p:style>
+          <p:txBody>
+            <a:bodyPr/>
+            <a:lstStyle/>
+            <a:p>
+              <a:endParaRPr lang="cs-CZ"/>
+            </a:p>
+          </p:txBody>
         </p:sp>
         <p:sp>
           <p:nvSpPr>
@@ -5060,6 +5144,13 @@
               <a:schemeClr val="lt1"/>
             </a:fontRef>
           </p:style>
+          <p:txBody>
+            <a:bodyPr/>
+            <a:lstStyle/>
+            <a:p>
+              <a:endParaRPr lang="cs-CZ"/>
+            </a:p>
+          </p:txBody>
         </p:sp>
         <p:sp>
           <p:nvSpPr>
@@ -5123,6 +5214,13 @@
               <a:schemeClr val="lt1"/>
             </a:fontRef>
           </p:style>
+          <p:txBody>
+            <a:bodyPr/>
+            <a:lstStyle/>
+            <a:p>
+              <a:endParaRPr lang="cs-CZ"/>
+            </a:p>
+          </p:txBody>
         </p:sp>
         <p:sp>
           <p:nvSpPr>
@@ -5164,6 +5262,13 @@
               <a:schemeClr val="lt1"/>
             </a:fontRef>
           </p:style>
+          <p:txBody>
+            <a:bodyPr/>
+            <a:lstStyle/>
+            <a:p>
+              <a:endParaRPr lang="cs-CZ"/>
+            </a:p>
+          </p:txBody>
         </p:sp>
         <p:sp>
           <p:nvSpPr>
@@ -5205,6 +5310,13 @@
               <a:schemeClr val="lt1"/>
             </a:fontRef>
           </p:style>
+          <p:txBody>
+            <a:bodyPr/>
+            <a:lstStyle/>
+            <a:p>
+              <a:endParaRPr lang="cs-CZ"/>
+            </a:p>
+          </p:txBody>
         </p:sp>
       </p:grpSp>
       <p:sp>
@@ -5338,7 +5450,7 @@
             <a:fld id="{5586B75A-687E-405C-8A0B-8D00578BA2C3}" type="datetimeFigureOut">
               <a:rPr lang="en-US" smtClean="0"/>
               <a:pPr/>
-              <a:t>9/20/2022</a:t>
+              <a:t>9/20/2026</a:t>
             </a:fld>
             <a:endParaRPr lang="en-US" dirty="0"/>
           </a:p>
@@ -7347,7 +7459,7 @@
               <a:rPr lang="cs-CZ" dirty="0">
                 <a:sym typeface="Wingdings" panose="05000000000000000000" pitchFamily="2" charset="2"/>
               </a:rPr>
-              <a:t>v pondělí od 13:15 do 14:15 (NB 413)</a:t>
+              <a:t>v pátek od 13:15 do 14:15 (NB 413)</a:t>
             </a:r>
           </a:p>
           <a:p>
@@ -8294,6 +8406,13 @@
               </a:schemeClr>
             </a:fontRef>
           </p:style>
+          <p:txBody>
+            <a:bodyPr/>
+            <a:lstStyle/>
+            <a:p>
+              <a:endParaRPr lang="cs-CZ"/>
+            </a:p>
+          </p:txBody>
         </p:sp>
         <p:sp>
           <p:nvSpPr>
@@ -8496,6 +8615,13 @@
               </a:schemeClr>
             </a:fontRef>
           </p:style>
+          <p:txBody>
+            <a:bodyPr/>
+            <a:lstStyle/>
+            <a:p>
+              <a:endParaRPr lang="cs-CZ"/>
+            </a:p>
+          </p:txBody>
         </p:sp>
         <p:sp>
           <p:nvSpPr>
@@ -8698,6 +8824,13 @@
               </a:schemeClr>
             </a:fontRef>
           </p:style>
+          <p:txBody>
+            <a:bodyPr/>
+            <a:lstStyle/>
+            <a:p>
+              <a:endParaRPr lang="cs-CZ"/>
+            </a:p>
+          </p:txBody>
         </p:sp>
         <p:sp>
           <p:nvSpPr>
@@ -8900,6 +9033,13 @@
               </a:schemeClr>
             </a:fontRef>
           </p:style>
+          <p:txBody>
+            <a:bodyPr/>
+            <a:lstStyle/>
+            <a:p>
+              <a:endParaRPr lang="cs-CZ"/>
+            </a:p>
+          </p:txBody>
         </p:sp>
         <p:sp>
           <p:nvSpPr>
@@ -9102,6 +9242,13 @@
               </a:schemeClr>
             </a:fontRef>
           </p:style>
+          <p:txBody>
+            <a:bodyPr/>
+            <a:lstStyle/>
+            <a:p>
+              <a:endParaRPr lang="cs-CZ"/>
+            </a:p>
+          </p:txBody>
         </p:sp>
         <p:sp>
           <p:nvSpPr>
@@ -9304,6 +9451,13 @@
               </a:schemeClr>
             </a:fontRef>
           </p:style>
+          <p:txBody>
+            <a:bodyPr/>
+            <a:lstStyle/>
+            <a:p>
+              <a:endParaRPr lang="cs-CZ"/>
+            </a:p>
+          </p:txBody>
         </p:sp>
       </p:grpSp>
     </p:spTree>
